--- a/2025-2026/Course_04/01_libraries_modules/01_pandas/Presentation/Python for absolute Beginners.pptx
+++ b/2025-2026/Course_04/01_libraries_modules/01_pandas/Presentation/Python for absolute Beginners.pptx
@@ -208,7 +208,7 @@
           <a:p>
             <a:fld id="{7ABB400E-A695-491E-855F-C615024AA450}" type="datetimeFigureOut">
               <a:rPr lang="en-US" smtClean="0"/>
-              <a:t>2/11/2026</a:t>
+              <a:t>2/18/2026</a:t>
             </a:fld>
             <a:endParaRPr lang="en-US"/>
           </a:p>
@@ -763,7 +763,7 @@
             <a:fld id="{1D8BD707-D9CF-40AE-B4C6-C98DA3205C09}" type="datetimeFigureOut">
               <a:rPr lang="en-US" smtClean="0"/>
               <a:pPr/>
-              <a:t>2/11/2026</a:t>
+              <a:t>2/18/2026</a:t>
             </a:fld>
             <a:endParaRPr lang="en-US"/>
           </a:p>
@@ -928,7 +928,7 @@
             <a:fld id="{1D8BD707-D9CF-40AE-B4C6-C98DA3205C09}" type="datetimeFigureOut">
               <a:rPr lang="en-US" smtClean="0"/>
               <a:pPr/>
-              <a:t>2/11/2026</a:t>
+              <a:t>2/18/2026</a:t>
             </a:fld>
             <a:endParaRPr lang="en-US"/>
           </a:p>
@@ -1103,7 +1103,7 @@
             <a:fld id="{1D8BD707-D9CF-40AE-B4C6-C98DA3205C09}" type="datetimeFigureOut">
               <a:rPr lang="en-US" smtClean="0"/>
               <a:pPr/>
-              <a:t>2/11/2026</a:t>
+              <a:t>2/18/2026</a:t>
             </a:fld>
             <a:endParaRPr lang="en-US"/>
           </a:p>
@@ -1268,7 +1268,7 @@
             <a:fld id="{1D8BD707-D9CF-40AE-B4C6-C98DA3205C09}" type="datetimeFigureOut">
               <a:rPr lang="en-US" smtClean="0"/>
               <a:pPr/>
-              <a:t>2/11/2026</a:t>
+              <a:t>2/18/2026</a:t>
             </a:fld>
             <a:endParaRPr lang="en-US"/>
           </a:p>
@@ -1510,7 +1510,7 @@
             <a:fld id="{1D8BD707-D9CF-40AE-B4C6-C98DA3205C09}" type="datetimeFigureOut">
               <a:rPr lang="en-US" smtClean="0"/>
               <a:pPr/>
-              <a:t>2/11/2026</a:t>
+              <a:t>2/18/2026</a:t>
             </a:fld>
             <a:endParaRPr lang="en-US"/>
           </a:p>
@@ -1792,7 +1792,7 @@
             <a:fld id="{1D8BD707-D9CF-40AE-B4C6-C98DA3205C09}" type="datetimeFigureOut">
               <a:rPr lang="en-US" smtClean="0"/>
               <a:pPr/>
-              <a:t>2/11/2026</a:t>
+              <a:t>2/18/2026</a:t>
             </a:fld>
             <a:endParaRPr lang="en-US"/>
           </a:p>
@@ -2208,7 +2208,7 @@
             <a:fld id="{1D8BD707-D9CF-40AE-B4C6-C98DA3205C09}" type="datetimeFigureOut">
               <a:rPr lang="en-US" smtClean="0"/>
               <a:pPr/>
-              <a:t>2/11/2026</a:t>
+              <a:t>2/18/2026</a:t>
             </a:fld>
             <a:endParaRPr lang="en-US"/>
           </a:p>
@@ -2322,7 +2322,7 @@
             <a:fld id="{1D8BD707-D9CF-40AE-B4C6-C98DA3205C09}" type="datetimeFigureOut">
               <a:rPr lang="en-US" smtClean="0"/>
               <a:pPr/>
-              <a:t>2/11/2026</a:t>
+              <a:t>2/18/2026</a:t>
             </a:fld>
             <a:endParaRPr lang="en-US"/>
           </a:p>
@@ -2414,7 +2414,7 @@
             <a:fld id="{1D8BD707-D9CF-40AE-B4C6-C98DA3205C09}" type="datetimeFigureOut">
               <a:rPr lang="en-US" smtClean="0"/>
               <a:pPr/>
-              <a:t>2/11/2026</a:t>
+              <a:t>2/18/2026</a:t>
             </a:fld>
             <a:endParaRPr lang="en-US"/>
           </a:p>
@@ -2686,7 +2686,7 @@
             <a:fld id="{1D8BD707-D9CF-40AE-B4C6-C98DA3205C09}" type="datetimeFigureOut">
               <a:rPr lang="en-US" smtClean="0"/>
               <a:pPr/>
-              <a:t>2/11/2026</a:t>
+              <a:t>2/18/2026</a:t>
             </a:fld>
             <a:endParaRPr lang="en-US"/>
           </a:p>
@@ -2935,7 +2935,7 @@
             <a:fld id="{1D8BD707-D9CF-40AE-B4C6-C98DA3205C09}" type="datetimeFigureOut">
               <a:rPr lang="en-US" smtClean="0"/>
               <a:pPr/>
-              <a:t>2/11/2026</a:t>
+              <a:t>2/18/2026</a:t>
             </a:fld>
             <a:endParaRPr lang="en-US"/>
           </a:p>
@@ -3143,7 +3143,7 @@
             <a:fld id="{1D8BD707-D9CF-40AE-B4C6-C98DA3205C09}" type="datetimeFigureOut">
               <a:rPr lang="en-US" smtClean="0"/>
               <a:pPr/>
-              <a:t>2/11/2026</a:t>
+              <a:t>2/18/2026</a:t>
             </a:fld>
             <a:endParaRPr lang="en-US"/>
           </a:p>
@@ -3502,9 +3502,15 @@
   <p:cSld>
     <p:bg>
       <p:bgPr>
-        <a:solidFill>
-          <a:srgbClr val="000000"/>
-        </a:solidFill>
+        <a:blipFill dpi="0" rotWithShape="1">
+          <a:blip r:embed="rId3">
+            <a:lum/>
+          </a:blip>
+          <a:srcRect/>
+          <a:stretch>
+            <a:fillRect t="-9000" b="-9000"/>
+          </a:stretch>
+        </a:blipFill>
         <a:effectLst/>
       </p:bgPr>
     </p:bg>
@@ -3633,7 +3639,7 @@
               </a:pathLst>
             </a:custGeom>
             <a:blipFill>
-              <a:blip r:embed="rId3"/>
+              <a:blip r:embed="rId4"/>
               <a:stretch>
                 <a:fillRect t="-98298" b="-98298"/>
               </a:stretch>
@@ -3693,10 +3699,10 @@
             </a:pathLst>
           </a:custGeom>
           <a:blipFill>
-            <a:blip r:embed="rId4">
+            <a:blip r:embed="rId5">
               <a:extLst>
                 <a:ext uri="{96DAC541-7B7A-43D3-8B79-37D633B846F1}">
-                  <asvg:svgBlip xmlns:asvg="http://schemas.microsoft.com/office/drawing/2016/SVG/main" r:embed="rId5"/>
+                  <asvg:svgBlip xmlns:asvg="http://schemas.microsoft.com/office/drawing/2016/SVG/main" r:embed="rId6"/>
                 </a:ext>
               </a:extLst>
             </a:blip>
@@ -3758,7 +3764,7 @@
             </a:pathLst>
           </a:custGeom>
           <a:blipFill>
-            <a:blip r:embed="rId6"/>
+            <a:blip r:embed="rId7"/>
             <a:stretch>
               <a:fillRect/>
             </a:stretch>
@@ -3851,7 +3857,7 @@
         <p:spPr>
           <a:xfrm>
             <a:off x="10286999" y="3775704"/>
-            <a:ext cx="7969045" cy="3194208"/>
+            <a:ext cx="7969045" cy="3231654"/>
           </a:xfrm>
           <a:prstGeom prst="rect">
             <a:avLst/>
@@ -3869,7 +3875,7 @@
               </a:lnSpc>
             </a:pPr>
             <a:r>
-              <a:rPr lang="en-US" sz="2593" b="1" i="1" u="sng" spc="85" dirty="0">
+              <a:rPr lang="en-US" sz="3600" b="1" i="1" u="sng" spc="85" dirty="0">
                 <a:solidFill>
                   <a:srgbClr val="FFC000"/>
                 </a:solidFill>
@@ -3906,7 +3912,7 @@
               <a:buChar char="•"/>
             </a:pPr>
             <a:r>
-              <a:rPr lang="en-US" sz="2593" spc="85" dirty="0">
+              <a:rPr lang="en-US" sz="3200" spc="85" dirty="0">
                 <a:solidFill>
                   <a:srgbClr val="FFFFFF"/>
                 </a:solidFill>
@@ -3927,7 +3933,7 @@
               <a:buChar char="•"/>
             </a:pPr>
             <a:r>
-              <a:rPr lang="en-US" sz="2593" spc="85" dirty="0">
+              <a:rPr lang="en-US" sz="3200" spc="85" dirty="0">
                 <a:solidFill>
                   <a:srgbClr val="FFFFFF"/>
                 </a:solidFill>
@@ -3946,7 +3952,7 @@
               <a:buChar char="•"/>
             </a:pPr>
             <a:r>
-              <a:rPr lang="en-US" sz="2593" spc="85" dirty="0">
+              <a:rPr lang="en-US" sz="3200" spc="85" dirty="0">
                 <a:solidFill>
                   <a:srgbClr val="FFFFFF"/>
                 </a:solidFill>
@@ -3965,7 +3971,7 @@
               <a:buChar char="•"/>
             </a:pPr>
             <a:r>
-              <a:rPr lang="en-US" sz="2593" spc="85" dirty="0">
+              <a:rPr lang="en-US" sz="3200" spc="85" dirty="0">
                 <a:solidFill>
                   <a:srgbClr val="FFFFFF"/>
                 </a:solidFill>
@@ -3984,7 +3990,7 @@
               <a:buChar char="•"/>
             </a:pPr>
             <a:r>
-              <a:rPr lang="fr-FR" sz="2593" spc="85" dirty="0">
+              <a:rPr lang="fr-FR" sz="3200" spc="85" dirty="0">
                 <a:solidFill>
                   <a:srgbClr val="FFFFFF"/>
                 </a:solidFill>
@@ -3994,7 +4000,7 @@
               <a:t>Data </a:t>
             </a:r>
             <a:r>
-              <a:rPr lang="fr-FR" sz="2593" spc="85" dirty="0" err="1">
+              <a:rPr lang="fr-FR" sz="3200" spc="85" dirty="0" err="1">
                 <a:solidFill>
                   <a:srgbClr val="FFFFFF"/>
                 </a:solidFill>
@@ -4004,7 +4010,7 @@
               <a:t>Cleaning</a:t>
             </a:r>
             <a:r>
-              <a:rPr lang="fr-FR" sz="2593" spc="85" dirty="0">
+              <a:rPr lang="fr-FR" sz="3200" spc="85" dirty="0">
                 <a:solidFill>
                   <a:srgbClr val="FFFFFF"/>
                 </a:solidFill>
@@ -4013,7 +4019,7 @@
               </a:rPr>
               <a:t> techniques</a:t>
             </a:r>
-            <a:endParaRPr lang="en-US" sz="2593" spc="85" dirty="0">
+            <a:endParaRPr lang="en-US" sz="3200" spc="85" dirty="0">
               <a:solidFill>
                 <a:srgbClr val="FFFFFF"/>
               </a:solidFill>
@@ -4057,7 +4063,7 @@
               </a:lnSpc>
             </a:pPr>
             <a:r>
-              <a:rPr lang="en-US" sz="2601" i="1" spc="85" dirty="0">
+              <a:rPr lang="en-US" sz="2800" i="1" spc="85" dirty="0">
                 <a:solidFill>
                   <a:srgbClr val="FFFFFF"/>
                 </a:solidFill>
@@ -4076,7 +4082,7 @@
               </a:lnSpc>
             </a:pPr>
             <a:r>
-              <a:rPr lang="en-US" sz="2601" i="1" spc="85" dirty="0">
+              <a:rPr lang="en-US" sz="2800" i="1" spc="85" dirty="0">
                 <a:solidFill>
                   <a:srgbClr val="FFFFFF"/>
                 </a:solidFill>
@@ -4104,8 +4110,8 @@
         </p:nvSpPr>
         <p:spPr>
           <a:xfrm>
-            <a:off x="1284972" y="9637597"/>
-            <a:ext cx="15469320" cy="363113"/>
+            <a:off x="1137620" y="9696036"/>
+            <a:ext cx="15469320" cy="370294"/>
           </a:xfrm>
           <a:prstGeom prst="rect">
             <a:avLst/>
@@ -4123,7 +4129,7 @@
               </a:lnSpc>
             </a:pPr>
             <a:r>
-              <a:rPr lang="en-US" sz="2238" i="1" spc="73" dirty="0">
+              <a:rPr lang="en-US" sz="2400" i="1" spc="73" dirty="0">
                 <a:solidFill>
                   <a:srgbClr val="FFFFFF"/>
                 </a:solidFill>
@@ -4132,22 +4138,10 @@
                 <a:cs typeface="Times New Roman" panose="02020603050405020304" pitchFamily="18" charset="0"/>
                 <a:sym typeface="Open Sauce Light Italics"/>
               </a:rPr>
-              <a:t>Abdesselam </a:t>
-            </a:r>
-            <a:r>
-              <a:rPr lang="en-US" sz="2238" i="1" spc="73">
-                <a:solidFill>
-                  <a:srgbClr val="FFFFFF"/>
-                </a:solidFill>
-                <a:latin typeface="Times New Roman" panose="02020603050405020304" pitchFamily="18" charset="0"/>
-                <a:ea typeface="Open Sauce Light Italics"/>
-                <a:cs typeface="Times New Roman" panose="02020603050405020304" pitchFamily="18" charset="0"/>
-                <a:sym typeface="Open Sauce Light Italics"/>
-              </a:rPr>
-              <a:t>Filali </a:t>
-            </a:r>
-            <a:r>
-              <a:rPr lang="en-US" sz="2238" i="1" spc="73">
+              <a:t>Abdesselam Filali </a:t>
+            </a:r>
+            <a:r>
+              <a:rPr lang="en-US" sz="2400" i="1" spc="73" dirty="0">
                 <a:solidFill>
                   <a:srgbClr val="FFC000"/>
                 </a:solidFill>
@@ -4155,21 +4149,10 @@
                 <a:cs typeface="Times New Roman" panose="02020603050405020304" pitchFamily="18" charset="0"/>
                 <a:sym typeface="Open Sauce Light Italics"/>
               </a:rPr>
-              <a:t>2026-02-11  </a:t>
-            </a:r>
-            <a:r>
-              <a:rPr lang="en-US" sz="2238" i="1" spc="73" dirty="0">
-                <a:solidFill>
-                  <a:srgbClr val="FFC000"/>
-                </a:solidFill>
-                <a:latin typeface="Times New Roman" panose="02020603050405020304" pitchFamily="18" charset="0"/>
-                <a:cs typeface="Times New Roman" panose="02020603050405020304" pitchFamily="18" charset="0"/>
-                <a:sym typeface="Open Sauce Light Italics"/>
-              </a:rPr>
-              <a:t>19h00 </a:t>
-            </a:r>
-            <a:r>
-              <a:rPr lang="en-US" sz="2238" i="1" spc="73" dirty="0">
+              <a:t>2026-02-22  13h30 </a:t>
+            </a:r>
+            <a:r>
+              <a:rPr lang="en-US" sz="2400" i="1" spc="73" dirty="0">
                 <a:solidFill>
                   <a:srgbClr val="FFFFFF"/>
                 </a:solidFill>
@@ -4198,10 +4181,10 @@
           <p:nvPr/>
         </p:nvPicPr>
         <p:blipFill>
-          <a:blip r:embed="rId7">
+          <a:blip r:embed="rId8">
             <a:extLst>
               <a:ext uri="{96DAC541-7B7A-43D3-8B79-37D633B846F1}">
-                <asvg:svgBlip xmlns:asvg="http://schemas.microsoft.com/office/drawing/2016/SVG/main" r:embed="rId8"/>
+                <asvg:svgBlip xmlns:asvg="http://schemas.microsoft.com/office/drawing/2016/SVG/main" r:embed="rId9"/>
               </a:ext>
             </a:extLst>
           </a:blip>
@@ -4211,8 +4194,8 @@
         </p:blipFill>
         <p:spPr>
           <a:xfrm>
-            <a:off x="15454341" y="275270"/>
-            <a:ext cx="2710241" cy="2974655"/>
+            <a:off x="16230600" y="854923"/>
+            <a:ext cx="1658432" cy="1820230"/>
           </a:xfrm>
           <a:prstGeom prst="rect">
             <a:avLst/>
